--- a/Report/FlowShift_Presentation.pptx
+++ b/Report/FlowShift_Presentation.pptx
@@ -126,17 +126,25 @@
 </p:presentation>
 </file>
 
+<file path=ppt/revisionInfo.xml><?xml version="1.0" encoding="utf-8"?>
+<p1510:revInfo xmlns:a="http://schemas.openxmlformats.org/drawingml/2006/main" xmlns:r="http://schemas.openxmlformats.org/officeDocument/2006/relationships" xmlns:p1510="http://schemas.microsoft.com/office/powerpoint/2015/10/main">
+  <p1510:revLst>
+    <p1510:client id="{68E3F3C0-F696-4D66-AC03-8EB998D65B33}" v="16" dt="2026-04-21T01:48:26.702"/>
+  </p1510:revLst>
+</p1510:revInfo>
+</file>
+
 <file path=ppt/changesInfos/changesInfo1.xml><?xml version="1.0" encoding="utf-8"?>
 <pc:chgInfo xmlns:a="http://schemas.openxmlformats.org/drawingml/2006/main" xmlns:r="http://schemas.openxmlformats.org/officeDocument/2006/relationships" xmlns:ac="http://schemas.microsoft.com/office/drawing/2013/main/command" xmlns:pc="http://schemas.microsoft.com/office/powerpoint/2013/main/command">
   <pc:docChgLst>
     <pc:chgData name="Kantaphon Kitsanakarakat" userId="34fbd52d53948f28" providerId="LiveId" clId="{2ACBE802-F97E-4423-8328-9FB178187958}"/>
     <pc:docChg chg="modSld">
-      <pc:chgData name="Kantaphon Kitsanakarakat" userId="34fbd52d53948f28" providerId="LiveId" clId="{2ACBE802-F97E-4423-8328-9FB178187958}" dt="2026-04-21T01:04:36.603" v="60" actId="20577"/>
+      <pc:chgData name="Kantaphon Kitsanakarakat" userId="34fbd52d53948f28" providerId="LiveId" clId="{2ACBE802-F97E-4423-8328-9FB178187958}" dt="2026-04-21T01:29:18.419" v="103" actId="20577"/>
       <pc:docMkLst>
         <pc:docMk/>
       </pc:docMkLst>
-      <pc:sldChg chg="modSp mod">
-        <pc:chgData name="Kantaphon Kitsanakarakat" userId="34fbd52d53948f28" providerId="LiveId" clId="{2ACBE802-F97E-4423-8328-9FB178187958}" dt="2026-04-21T01:04:36.603" v="60" actId="20577"/>
+      <pc:sldChg chg="addSp modSp mod modNotesTx">
+        <pc:chgData name="Kantaphon Kitsanakarakat" userId="34fbd52d53948f28" providerId="LiveId" clId="{2ACBE802-F97E-4423-8328-9FB178187958}" dt="2026-04-21T01:25:09.786" v="63" actId="34307"/>
         <pc:sldMkLst>
           <pc:docMk/>
           <pc:sldMk cId="0" sldId="256"/>
@@ -157,6 +165,28 @@
             <ac:spMk id="10" creationId="{00000000-0000-0000-0000-000000000000}"/>
           </ac:spMkLst>
         </pc:spChg>
+        <pc:picChg chg="add mod">
+          <ac:chgData name="Kantaphon Kitsanakarakat" userId="34fbd52d53948f28" providerId="LiveId" clId="{2ACBE802-F97E-4423-8328-9FB178187958}" dt="2026-04-21T01:25:09.786" v="63" actId="34307"/>
+          <ac:picMkLst>
+            <pc:docMk/>
+            <pc:sldMk cId="0" sldId="256"/>
+            <ac:picMk id="28" creationId="{7F146671-2029-65D2-2265-76B5F65D8E5F}"/>
+          </ac:picMkLst>
+        </pc:picChg>
+      </pc:sldChg>
+      <pc:sldChg chg="modNotesTx">
+        <pc:chgData name="Kantaphon Kitsanakarakat" userId="34fbd52d53948f28" providerId="LiveId" clId="{2ACBE802-F97E-4423-8328-9FB178187958}" dt="2026-04-21T01:27:57.796" v="65" actId="20577"/>
+        <pc:sldMkLst>
+          <pc:docMk/>
+          <pc:sldMk cId="0" sldId="262"/>
+        </pc:sldMkLst>
+      </pc:sldChg>
+      <pc:sldChg chg="modNotesTx">
+        <pc:chgData name="Kantaphon Kitsanakarakat" userId="34fbd52d53948f28" providerId="LiveId" clId="{2ACBE802-F97E-4423-8328-9FB178187958}" dt="2026-04-21T01:29:18.419" v="103" actId="20577"/>
+        <pc:sldMkLst>
+          <pc:docMk/>
+          <pc:sldMk cId="0" sldId="264"/>
+        </pc:sldMkLst>
       </pc:sldChg>
     </pc:docChg>
   </pc:docChgLst>
@@ -202,6 +232,12 @@
             <c:idx val="0"/>
             <c:invertIfNegative val="0"/>
             <c:bubble3D val="0"/>
+            <c:spPr>
+              <a:solidFill>
+                <a:srgbClr val="1976D2"/>
+              </a:solidFill>
+              <a:effectLst/>
+            </c:spPr>
             <c:extLst>
               <c:ext xmlns:c16="http://schemas.microsoft.com/office/drawing/2014/chart" uri="{C3380CC4-5D6E-409C-BE32-E72D297353CC}">
                 <c16:uniqueId val="{00000001-B4BA-48C9-B43D-FCC728F76AAF}"/>
@@ -212,6 +248,12 @@
             <c:idx val="1"/>
             <c:invertIfNegative val="0"/>
             <c:bubble3D val="0"/>
+            <c:spPr>
+              <a:solidFill>
+                <a:srgbClr val="1976D2"/>
+              </a:solidFill>
+              <a:effectLst/>
+            </c:spPr>
             <c:extLst>
               <c:ext xmlns:c16="http://schemas.microsoft.com/office/drawing/2014/chart" uri="{C3380CC4-5D6E-409C-BE32-E72D297353CC}">
                 <c16:uniqueId val="{00000003-B4BA-48C9-B43D-FCC728F76AAF}"/>
@@ -1010,6 +1052,149 @@
           <a:bodyPr/>
           <a:lstStyle/>
           <a:p>
+            <a:r>
+              <a:rPr lang="en-US" sz="1800" kern="1200" dirty="0">
+                <a:solidFill>
+                  <a:schemeClr val="tx1"/>
+                </a:solidFill>
+                <a:effectLst/>
+                <a:latin typeface="+mn-lt"/>
+                <a:ea typeface="+mn-ea"/>
+                <a:cs typeface="+mn-cs"/>
+              </a:rPr>
+              <a:t>Today I will present </a:t>
+            </a:r>
+            <a:r>
+              <a:rPr lang="en-US" sz="1800" kern="1200" dirty="0" err="1">
+                <a:solidFill>
+                  <a:schemeClr val="tx1"/>
+                </a:solidFill>
+                <a:effectLst/>
+                <a:latin typeface="+mn-lt"/>
+                <a:ea typeface="+mn-ea"/>
+                <a:cs typeface="+mn-cs"/>
+              </a:rPr>
+              <a:t>FlowShift</a:t>
+            </a:r>
+            <a:r>
+              <a:rPr lang="en-US" sz="1800" kern="1200" dirty="0">
+                <a:solidFill>
+                  <a:schemeClr val="tx1"/>
+                </a:solidFill>
+                <a:effectLst/>
+                <a:latin typeface="+mn-lt"/>
+                <a:ea typeface="+mn-ea"/>
+                <a:cs typeface="+mn-cs"/>
+              </a:rPr>
+              <a:t> — our project analyzing how urban traffic congestion influences public transport demand in Los Angeles.</a:t>
+            </a:r>
+          </a:p>
+          <a:p>
+            <a:r>
+              <a:rPr lang="en-US" sz="1800" kern="1200" dirty="0">
+                <a:solidFill>
+                  <a:schemeClr val="tx1"/>
+                </a:solidFill>
+                <a:effectLst/>
+                <a:latin typeface="+mn-lt"/>
+                <a:ea typeface="+mn-ea"/>
+                <a:cs typeface="+mn-cs"/>
+              </a:rPr>
+              <a:t>Our research question is: When does traffic congestion happen and</a:t>
+            </a:r>
+            <a:r>
+              <a:rPr lang="th-TH" sz="1800" kern="1200" dirty="0">
+                <a:solidFill>
+                  <a:schemeClr val="tx1"/>
+                </a:solidFill>
+                <a:effectLst/>
+                <a:latin typeface="+mn-lt"/>
+                <a:ea typeface="+mn-ea"/>
+                <a:cs typeface="+mn-cs"/>
+              </a:rPr>
+              <a:t> </a:t>
+            </a:r>
+            <a:r>
+              <a:rPr lang="en-US" sz="1800" kern="1200" dirty="0">
+                <a:solidFill>
+                  <a:schemeClr val="tx1"/>
+                </a:solidFill>
+                <a:effectLst/>
+                <a:latin typeface="+mn-lt"/>
+                <a:ea typeface="+mn-ea"/>
+                <a:cs typeface="+mn-cs"/>
+              </a:rPr>
+              <a:t> do people switch to public transport when roads become congested, and by how much?</a:t>
+            </a:r>
+          </a:p>
+          <a:p>
+            <a:r>
+              <a:rPr lang="en-US" sz="1800" kern="1200" dirty="0">
+                <a:solidFill>
+                  <a:schemeClr val="tx1"/>
+                </a:solidFill>
+                <a:effectLst/>
+                <a:latin typeface="+mn-lt"/>
+                <a:ea typeface="+mn-ea"/>
+                <a:cs typeface="+mn-cs"/>
+              </a:rPr>
+              <a:t>To answer this, we used large-scale data from over 8,600 freeway sensors and public transit ridership across 20 agencies, covering the full year of 2021.</a:t>
+            </a:r>
+          </a:p>
+          <a:p>
+            <a:endParaRPr lang="en-US" sz="1800" kern="1200" dirty="0">
+              <a:solidFill>
+                <a:schemeClr val="tx1"/>
+              </a:solidFill>
+              <a:effectLst/>
+              <a:latin typeface="+mn-lt"/>
+              <a:ea typeface="+mn-ea"/>
+              <a:cs typeface="+mn-cs"/>
+            </a:endParaRPr>
+          </a:p>
+          <a:p>
+            <a:pPr marL="0" marR="0" lvl="0" indent="0" algn="l" defTabSz="914400" rtl="0" eaLnBrk="1" fontAlgn="auto" latinLnBrk="0" hangingPunct="1">
+              <a:lnSpc>
+                <a:spcPct val="100000"/>
+              </a:lnSpc>
+              <a:spcBef>
+                <a:spcPts val="0"/>
+              </a:spcBef>
+              <a:spcAft>
+                <a:spcPts val="0"/>
+              </a:spcAft>
+              <a:buClrTx/>
+              <a:buSzTx/>
+              <a:buFontTx/>
+              <a:buNone/>
+              <a:tabLst/>
+              <a:defRPr/>
+            </a:pPr>
+            <a:r>
+              <a:rPr lang="en-US" sz="1800" kern="1200" dirty="0">
+                <a:solidFill>
+                  <a:schemeClr val="tx1"/>
+                </a:solidFill>
+                <a:effectLst/>
+                <a:latin typeface="+mn-lt"/>
+                <a:ea typeface="+mn-ea"/>
+                <a:cs typeface="+mn-cs"/>
+              </a:rPr>
+              <a:t>Traffic congestion costs California billions annually. Our analysis creates a triple-win: government agencies can use our congestion classifier as an early warning system, companies can use our flow forecasts for route optimization, and commuters benefit from shorter travel times and lower emissions when congestion is predicted before it happens.</a:t>
+            </a:r>
+          </a:p>
+          <a:p>
+            <a:endParaRPr lang="en-US" sz="1800" kern="1200" dirty="0">
+              <a:solidFill>
+                <a:schemeClr val="tx1"/>
+              </a:solidFill>
+              <a:effectLst/>
+              <a:latin typeface="+mn-lt"/>
+              <a:ea typeface="+mn-ea"/>
+              <a:cs typeface="+mn-cs"/>
+            </a:endParaRPr>
+          </a:p>
+          <a:p>
             <a:endParaRPr lang="en-US" dirty="0"/>
           </a:p>
         </p:txBody>
@@ -1094,6 +1279,76 @@
           <a:bodyPr/>
           <a:lstStyle/>
           <a:p>
+            <a:r>
+              <a:rPr lang="en-US" sz="1800" kern="1200" dirty="0">
+                <a:solidFill>
+                  <a:schemeClr val="tx1"/>
+                </a:solidFill>
+                <a:effectLst/>
+                <a:latin typeface="+mn-lt"/>
+                <a:ea typeface="+mn-ea"/>
+                <a:cs typeface="+mn-cs"/>
+              </a:rPr>
+              <a:t>Now the modeling. We tested six models in two groups, and the reason for this split is the most important finding of our project.</a:t>
+            </a:r>
+          </a:p>
+          <a:p>
+            <a:r>
+              <a:rPr lang="en-US" sz="1800" kern="1200" dirty="0">
+                <a:solidFill>
+                  <a:schemeClr val="tx1"/>
+                </a:solidFill>
+                <a:effectLst/>
+                <a:latin typeface="+mn-lt"/>
+                <a:ea typeface="+mn-ea"/>
+                <a:cs typeface="+mn-cs"/>
+              </a:rPr>
+              <a:t>We chose Linear Regression as a baseline — it’s the simplest model and tells us if the relationship is linear. We chose Random Forest because it captures non-linear patterns like rush hour curves.</a:t>
+            </a:r>
+          </a:p>
+          <a:p>
+            <a:r>
+              <a:rPr lang="en-US" sz="1800" kern="1200" dirty="0">
+                <a:solidFill>
+                  <a:schemeClr val="tx1"/>
+                </a:solidFill>
+                <a:effectLst/>
+                <a:latin typeface="+mn-lt"/>
+                <a:ea typeface="+mn-ea"/>
+                <a:cs typeface="+mn-cs"/>
+              </a:rPr>
+              <a:t>Group A includes lag features — flow from 5 minutes, 1 hour, and 1 day ago. Group B uses only calendar features like hour and day of week.</a:t>
+            </a:r>
+          </a:p>
+          <a:p>
+            <a:r>
+              <a:rPr lang="en-US" sz="1800" kern="1200" dirty="0">
+                <a:solidFill>
+                  <a:schemeClr val="tx1"/>
+                </a:solidFill>
+                <a:effectLst/>
+                <a:latin typeface="+mn-lt"/>
+                <a:ea typeface="+mn-ea"/>
+                <a:cs typeface="+mn-cs"/>
+              </a:rPr>
+              <a:t>The key result: Linear Regression R² drops from 0.999 to 0.231 when we remove lag features. This proves that 77% of the model’s accuracy comes from autocorrelation — just knowing the road was busy 5 minutes ago. Random Forest without lags still achieves 0.955, showing it can learn the non-linear time-of-day structure that linear models cannot.</a:t>
+            </a:r>
+          </a:p>
+          <a:p>
+            <a:r>
+              <a:rPr lang="en-US" sz="1800" kern="1200" dirty="0">
+                <a:solidFill>
+                  <a:schemeClr val="tx1"/>
+                </a:solidFill>
+                <a:effectLst/>
+                <a:latin typeface="+mn-lt"/>
+                <a:ea typeface="+mn-ea"/>
+                <a:cs typeface="+mn-cs"/>
+              </a:rPr>
+              <a:t>The no-lag R² of 0.955 is the realistic prediction benchmark — it tells us how well we can forecast traffic before it happens.</a:t>
+            </a:r>
+          </a:p>
+          <a:p>
             <a:endParaRPr lang="en-US" dirty="0"/>
           </a:p>
         </p:txBody>
@@ -1178,6 +1433,34 @@
           <a:bodyPr/>
           <a:lstStyle/>
           <a:p>
+            <a:r>
+              <a:rPr lang="en-US" sz="1800" kern="1200" dirty="0">
+                <a:solidFill>
+                  <a:schemeClr val="tx1"/>
+                </a:solidFill>
+                <a:effectLst/>
+                <a:latin typeface="+mn-lt"/>
+                <a:ea typeface="+mn-ea"/>
+                <a:cs typeface="+mn-cs"/>
+              </a:rPr>
+              <a:t>The R² comparison makes this visually clear. With lag features, everything is near 1.0. Without lags, only Random Forest maintains strong performance.</a:t>
+            </a:r>
+          </a:p>
+          <a:p>
+            <a:r>
+              <a:rPr lang="en-US" sz="1800" kern="1200" dirty="0">
+                <a:solidFill>
+                  <a:schemeClr val="tx1"/>
+                </a:solidFill>
+                <a:effectLst/>
+                <a:latin typeface="+mn-lt"/>
+                <a:ea typeface="+mn-ea"/>
+                <a:cs typeface="+mn-cs"/>
+              </a:rPr>
+              <a:t>The feature importance chart shows that hour of the day contributes over 50% of the model’s prediction power, confirming that traffic is fundamentally driven by daily routines.</a:t>
+            </a:r>
+          </a:p>
+          <a:p>
             <a:endParaRPr lang="en-US" dirty="0"/>
           </a:p>
         </p:txBody>
@@ -1262,6 +1545,76 @@
           <a:bodyPr/>
           <a:lstStyle/>
           <a:p>
+            <a:r>
+              <a:rPr lang="en-US" sz="1800" kern="1200" dirty="0">
+                <a:solidFill>
+                  <a:schemeClr val="tx1"/>
+                </a:solidFill>
+                <a:effectLst/>
+                <a:latin typeface="+mn-lt"/>
+                <a:ea typeface="+mn-ea"/>
+                <a:cs typeface="+mn-cs"/>
+              </a:rPr>
+              <a:t>For classification, we predict whether traffic is congested or free-flowing.</a:t>
+            </a:r>
+          </a:p>
+          <a:p>
+            <a:r>
+              <a:rPr lang="en-US" sz="1800" kern="1200" dirty="0">
+                <a:solidFill>
+                  <a:schemeClr val="tx1"/>
+                </a:solidFill>
+                <a:effectLst/>
+                <a:latin typeface="+mn-lt"/>
+                <a:ea typeface="+mn-ea"/>
+                <a:cs typeface="+mn-cs"/>
+              </a:rPr>
+              <a:t>We chose three algorithms, Decision Tree because it’s interpretable — we can see which features split the data. KNN as a distance-based approach. And Random Forest for the best overall accuracy.</a:t>
+            </a:r>
+          </a:p>
+          <a:p>
+            <a:r>
+              <a:rPr lang="en-US" sz="1800" kern="1200" dirty="0">
+                <a:solidFill>
+                  <a:schemeClr val="tx1"/>
+                </a:solidFill>
+                <a:effectLst/>
+                <a:latin typeface="+mn-lt"/>
+                <a:ea typeface="+mn-ea"/>
+                <a:cs typeface="+mn-cs"/>
+              </a:rPr>
+              <a:t>We deliberately used only calendar features here — no lags — to prove that congestion is predictable from the time and day alone. All three models achieve AUC above 0.92, with Decision Tree reaching 0.959.</a:t>
+            </a:r>
+          </a:p>
+          <a:p>
+            <a:r>
+              <a:rPr lang="en-US" sz="1800" kern="1200" dirty="0">
+                <a:solidFill>
+                  <a:schemeClr val="tx1"/>
+                </a:solidFill>
+                <a:effectLst/>
+                <a:latin typeface="+mn-lt"/>
+                <a:ea typeface="+mn-ea"/>
+                <a:cs typeface="+mn-cs"/>
+              </a:rPr>
+              <a:t>The ROC curves show all models far above the random guess diagonal. The practical meaning is that a traffic management center could predict congestion before it happens, using only a clock and calendar.</a:t>
+            </a:r>
+          </a:p>
+          <a:p>
+            <a:r>
+              <a:rPr lang="en-US" sz="1800" kern="1200" dirty="0">
+                <a:solidFill>
+                  <a:schemeClr val="tx1"/>
+                </a:solidFill>
+                <a:effectLst/>
+                <a:latin typeface="+mn-lt"/>
+                <a:ea typeface="+mn-ea"/>
+                <a:cs typeface="+mn-cs"/>
+              </a:rPr>
+              <a:t> </a:t>
+            </a:r>
+          </a:p>
+          <a:p>
             <a:endParaRPr lang="en-US" dirty="0"/>
           </a:p>
         </p:txBody>
@@ -1430,6 +1783,48 @@
           <a:bodyPr/>
           <a:lstStyle/>
           <a:p>
+            <a:r>
+              <a:rPr lang="en-US" sz="1800" kern="1200" dirty="0">
+                <a:solidFill>
+                  <a:schemeClr val="tx1"/>
+                </a:solidFill>
+                <a:effectLst/>
+                <a:latin typeface="+mn-lt"/>
+                <a:ea typeface="+mn-ea"/>
+                <a:cs typeface="+mn-cs"/>
+              </a:rPr>
+              <a:t>We used K-Means clustering to discover natural groupings among sensors. We chose K-Means because sensors naturally form groups by traffic volume — the elbow method and silhouette score both pointed to k=2, confirming two distinct archetypes: high-flow urban corridors concentrated in LA and the Bay Area, and lower-flow peripheral routes.</a:t>
+            </a:r>
+          </a:p>
+          <a:p>
+            <a:r>
+              <a:rPr lang="en-US" sz="1800" kern="1200" dirty="0">
+                <a:solidFill>
+                  <a:schemeClr val="tx1"/>
+                </a:solidFill>
+                <a:effectLst/>
+                <a:latin typeface="+mn-lt"/>
+                <a:ea typeface="+mn-ea"/>
+                <a:cs typeface="+mn-cs"/>
+              </a:rPr>
+              <a:t>For time series, we compared ARIMA and LSTM. We chose ARIMA because it’s the classical method from Chapter 7 that captures linear autocorrelation. LSTM is a deep learning approach that can learn non-linear temporal patterns, trained on our RTX 4070 GPU with CUDA.</a:t>
+            </a:r>
+          </a:p>
+          <a:p>
+            <a:r>
+              <a:rPr lang="en-US" sz="1800" kern="1200" dirty="0">
+                <a:solidFill>
+                  <a:schemeClr val="tx1"/>
+                </a:solidFill>
+                <a:effectLst/>
+                <a:latin typeface="+mn-lt"/>
+                <a:ea typeface="+mn-ea"/>
+                <a:cs typeface="+mn-cs"/>
+              </a:rPr>
+              <a:t>Interestingly, ARIMA with rolling 1-step forecast achieves MAE of 19,851 — actually beating LSTM’s 48,443. This is because ARIMA re-observes actual data at each step, while LSTM was trained once on historical data.</a:t>
+            </a:r>
+          </a:p>
+          <a:p>
             <a:endParaRPr lang="en-US" dirty="0"/>
           </a:p>
         </p:txBody>
@@ -1514,6 +1909,88 @@
           <a:bodyPr/>
           <a:lstStyle/>
           <a:p>
+            <a:r>
+              <a:rPr lang="en-US" sz="1800" kern="1200" dirty="0">
+                <a:solidFill>
+                  <a:schemeClr val="tx1"/>
+                </a:solidFill>
+                <a:effectLst/>
+                <a:latin typeface="+mn-lt"/>
+                <a:ea typeface="+mn-ea"/>
+                <a:cs typeface="+mn-cs"/>
+              </a:rPr>
+              <a:t>To conclude with four key takeaways.</a:t>
+            </a:r>
+          </a:p>
+          <a:p>
+            <a:r>
+              <a:rPr lang="en-US" sz="1800" kern="1200" dirty="0">
+                <a:solidFill>
+                  <a:schemeClr val="tx1"/>
+                </a:solidFill>
+                <a:effectLst/>
+                <a:latin typeface="+mn-lt"/>
+                <a:ea typeface="+mn-ea"/>
+                <a:cs typeface="+mn-cs"/>
+              </a:rPr>
+              <a:t>First, congestion and public transport ridership are positively correlated at r equals 0.73, though both were driven upward by pandemic recovery in 2021.</a:t>
+            </a:r>
+          </a:p>
+          <a:p>
+            <a:r>
+              <a:rPr lang="en-US" sz="1800" kern="1200" dirty="0">
+                <a:solidFill>
+                  <a:schemeClr val="tx1"/>
+                </a:solidFill>
+                <a:effectLst/>
+                <a:latin typeface="+mn-lt"/>
+                <a:ea typeface="+mn-ea"/>
+                <a:cs typeface="+mn-cs"/>
+              </a:rPr>
+              <a:t>Second, Random Forest with lag features is the best model at R² of 0.999, but without lags the realistic benchmark is R² of 0.955 — and this is the actionable prediction because you can plan for Tuesday 8 AM before it happens.</a:t>
+            </a:r>
+          </a:p>
+          <a:p>
+            <a:r>
+              <a:rPr lang="en-US" sz="1800" kern="1200" dirty="0">
+                <a:solidFill>
+                  <a:schemeClr val="tx1"/>
+                </a:solidFill>
+                <a:effectLst/>
+                <a:latin typeface="+mn-lt"/>
+                <a:ea typeface="+mn-ea"/>
+                <a:cs typeface="+mn-cs"/>
+              </a:rPr>
+              <a:t>Third, congestion is highly predictable from calendar features alone, with AUC above 0.95 — confirming the strong time structure in traffic data.</a:t>
+            </a:r>
+          </a:p>
+          <a:p>
+            <a:r>
+              <a:rPr lang="en-US" sz="1800" kern="1200" dirty="0">
+                <a:solidFill>
+                  <a:schemeClr val="tx1"/>
+                </a:solidFill>
+                <a:effectLst/>
+                <a:latin typeface="+mn-lt"/>
+                <a:ea typeface="+mn-ea"/>
+                <a:cs typeface="+mn-cs"/>
+              </a:rPr>
+              <a:t>Fourth, K-Means reveals two sensor archetypes. For future work, we suggest spatial joins to transit stops and causal inference methods to separate pandemic recovery from genuine modal shift.</a:t>
+            </a:r>
+          </a:p>
+          <a:p>
+            <a:r>
+              <a:rPr lang="en-US" sz="1800" kern="1200">
+                <a:solidFill>
+                  <a:schemeClr val="tx1"/>
+                </a:solidFill>
+                <a:effectLst/>
+                <a:latin typeface="+mn-lt"/>
+                <a:ea typeface="+mn-ea"/>
+                <a:cs typeface="+mn-cs"/>
+              </a:rPr>
+              <a:t>Thank you. </a:t>
+            </a:r>
             <a:endParaRPr lang="en-US" dirty="0"/>
           </a:p>
         </p:txBody>
@@ -1598,6 +2075,37 @@
           <a:bodyPr/>
           <a:lstStyle/>
           <a:p>
+            <a:pPr marL="0" marR="0" lvl="0" indent="0" algn="l" defTabSz="914400" rtl="0" eaLnBrk="1" fontAlgn="auto" latinLnBrk="0" hangingPunct="1">
+              <a:lnSpc>
+                <a:spcPct val="100000"/>
+              </a:lnSpc>
+              <a:spcBef>
+                <a:spcPts val="0"/>
+              </a:spcBef>
+              <a:spcAft>
+                <a:spcPts val="0"/>
+              </a:spcAft>
+              <a:buClrTx/>
+              <a:buSzTx/>
+              <a:buFontTx/>
+              <a:buNone/>
+              <a:tabLst/>
+              <a:defRPr/>
+            </a:pPr>
+            <a:r>
+              <a:rPr lang="en-US" sz="1800" kern="1200" dirty="0">
+                <a:solidFill>
+                  <a:schemeClr val="tx1"/>
+                </a:solidFill>
+                <a:effectLst/>
+                <a:latin typeface="+mn-lt"/>
+                <a:ea typeface="+mn-ea"/>
+                <a:cs typeface="+mn-cs"/>
+              </a:rPr>
+              <a:t>This slide shows our end-to-end pipeline. We go from data collection, through preprocessing and exploration, to statistical testing, machine learning models, and time series forecasting. Each step builds on the previous one, and I will walk through the key findings from each stage.</a:t>
+            </a:r>
+          </a:p>
+          <a:p>
             <a:endParaRPr lang="en-US" dirty="0"/>
           </a:p>
         </p:txBody>
@@ -1682,6 +2190,86 @@
           <a:bodyPr/>
           <a:lstStyle/>
           <a:p>
+            <a:r>
+              <a:rPr lang="en-US" sz="1800" kern="1200" dirty="0">
+                <a:solidFill>
+                  <a:schemeClr val="tx1"/>
+                </a:solidFill>
+                <a:effectLst/>
+                <a:latin typeface="+mn-lt"/>
+                <a:ea typeface="+mn-ea"/>
+                <a:cs typeface="+mn-cs"/>
+              </a:rPr>
+              <a:t>We used two complementary datasets.</a:t>
+            </a:r>
+          </a:p>
+          <a:p>
+            <a:r>
+              <a:rPr lang="en-US" sz="1800" kern="1200" dirty="0">
+                <a:solidFill>
+                  <a:schemeClr val="tx1"/>
+                </a:solidFill>
+                <a:effectLst/>
+                <a:latin typeface="+mn-lt"/>
+                <a:ea typeface="+mn-ea"/>
+                <a:cs typeface="+mn-cs"/>
+              </a:rPr>
+              <a:t>The first is traffic flow data from the </a:t>
+            </a:r>
+            <a:r>
+              <a:rPr lang="en-US" sz="1800" kern="1200" dirty="0" err="1">
+                <a:solidFill>
+                  <a:schemeClr val="tx1"/>
+                </a:solidFill>
+                <a:effectLst/>
+                <a:latin typeface="+mn-lt"/>
+                <a:ea typeface="+mn-ea"/>
+                <a:cs typeface="+mn-cs"/>
+              </a:rPr>
+              <a:t>LargeST</a:t>
+            </a:r>
+            <a:r>
+              <a:rPr lang="en-US" sz="1800" kern="1200" dirty="0">
+                <a:solidFill>
+                  <a:schemeClr val="tx1"/>
+                </a:solidFill>
+                <a:effectLst/>
+                <a:latin typeface="+mn-lt"/>
+                <a:ea typeface="+mn-ea"/>
+                <a:cs typeface="+mn-cs"/>
+              </a:rPr>
+              <a:t> benchmark — 8,600 freeway sensors across California, recording vehicle counts every 5 minutes for all of 2021. That gives us over 900 million observations.</a:t>
+            </a:r>
+          </a:p>
+          <a:p>
+            <a:r>
+              <a:rPr lang="en-US" sz="1800" kern="1200" dirty="0">
+                <a:solidFill>
+                  <a:schemeClr val="tx1"/>
+                </a:solidFill>
+                <a:effectLst/>
+                <a:latin typeface="+mn-lt"/>
+                <a:ea typeface="+mn-ea"/>
+                <a:cs typeface="+mn-cs"/>
+              </a:rPr>
+              <a:t>The second is public transit ridership from the National Transit Database — monthly unlinked passenger trips across 20 Los Angeles transit agencies, covering 8 modes including bus, light rail, and heavy rail.</a:t>
+            </a:r>
+          </a:p>
+          <a:p>
+            <a:r>
+              <a:rPr lang="en-US" sz="1800" kern="1200" dirty="0">
+                <a:solidFill>
+                  <a:schemeClr val="tx1"/>
+                </a:solidFill>
+                <a:effectLst/>
+                <a:latin typeface="+mn-lt"/>
+                <a:ea typeface="+mn-ea"/>
+                <a:cs typeface="+mn-cs"/>
+              </a:rPr>
+              <a:t>By merging these at the monthly level, we can directly compare traffic congestion with public transport usage over time.</a:t>
+            </a:r>
+          </a:p>
+          <a:p>
             <a:endParaRPr lang="en-US" dirty="0"/>
           </a:p>
         </p:txBody>
@@ -1766,6 +2354,62 @@
           <a:bodyPr/>
           <a:lstStyle/>
           <a:p>
+            <a:r>
+              <a:rPr lang="en-US" sz="1800" kern="1200" dirty="0">
+                <a:solidFill>
+                  <a:schemeClr val="tx1"/>
+                </a:solidFill>
+                <a:effectLst/>
+                <a:latin typeface="+mn-lt"/>
+                <a:ea typeface="+mn-ea"/>
+                <a:cs typeface="+mn-cs"/>
+              </a:rPr>
+              <a:t>Before analysis, we cleaned the data.</a:t>
+            </a:r>
+          </a:p>
+          <a:p>
+            <a:r>
+              <a:rPr lang="en-US" sz="1800" kern="1200" dirty="0">
+                <a:solidFill>
+                  <a:schemeClr val="tx1"/>
+                </a:solidFill>
+                <a:effectLst/>
+                <a:latin typeface="+mn-lt"/>
+                <a:ea typeface="+mn-ea"/>
+                <a:cs typeface="+mn-cs"/>
+              </a:rPr>
+              <a:t>We checked missing values — the overall missing rate was only 0.94%, but 91 sensors had more than 20% missing data, so we dropped those and kept 8,509 reliable sensors.</a:t>
+            </a:r>
+          </a:p>
+          <a:p>
+            <a:r>
+              <a:rPr lang="en-US" sz="1800" kern="1200" dirty="0">
+                <a:solidFill>
+                  <a:schemeClr val="tx1"/>
+                </a:solidFill>
+                <a:effectLst/>
+                <a:latin typeface="+mn-lt"/>
+                <a:ea typeface="+mn-ea"/>
+                <a:cs typeface="+mn-cs"/>
+              </a:rPr>
+              <a:t>For outlier detection, we used the 3-sigma principle from the lecture and replaced over 920,000 outlier readings.</a:t>
+            </a:r>
+          </a:p>
+          <a:p>
+            <a:r>
+              <a:rPr lang="en-US" sz="1800" kern="1200" dirty="0">
+                <a:solidFill>
+                  <a:schemeClr val="tx1"/>
+                </a:solidFill>
+                <a:effectLst/>
+                <a:latin typeface="+mn-lt"/>
+                <a:ea typeface="+mn-ea"/>
+                <a:cs typeface="+mn-cs"/>
+              </a:rPr>
+              <a:t>Then we engineered features: temporal features like hour, day of week, and season; a congestion flag based on the 75th percentile of total flow; and lag features at 5-minute, 1-hour, and 1-day intervals to capture autocorrelation.</a:t>
+            </a:r>
+          </a:p>
+          <a:p>
             <a:endParaRPr lang="en-US" dirty="0"/>
           </a:p>
         </p:txBody>
@@ -1850,6 +2494,62 @@
           <a:bodyPr/>
           <a:lstStyle/>
           <a:p>
+            <a:r>
+              <a:rPr lang="en-US" sz="1800" kern="1200" dirty="0">
+                <a:solidFill>
+                  <a:schemeClr val="tx1"/>
+                </a:solidFill>
+                <a:effectLst/>
+                <a:latin typeface="+mn-lt"/>
+                <a:ea typeface="+mn-ea"/>
+                <a:cs typeface="+mn-cs"/>
+              </a:rPr>
+              <a:t>From our exploratory analysis, we see clear daily patterns.</a:t>
+            </a:r>
+          </a:p>
+          <a:p>
+            <a:r>
+              <a:rPr lang="en-US" sz="1800" kern="1200" dirty="0">
+                <a:solidFill>
+                  <a:schemeClr val="tx1"/>
+                </a:solidFill>
+                <a:effectLst/>
+                <a:latin typeface="+mn-lt"/>
+                <a:ea typeface="+mn-ea"/>
+                <a:cs typeface="+mn-cs"/>
+              </a:rPr>
+              <a:t>Weekdays show two peaks — a morning commute around 8 AM and an evening commute at 5 to 6 PM. Both breach the congestion threshold shown by the red dashed line.</a:t>
+            </a:r>
+          </a:p>
+          <a:p>
+            <a:r>
+              <a:rPr lang="en-US" sz="1800" kern="1200" dirty="0">
+                <a:solidFill>
+                  <a:schemeClr val="tx1"/>
+                </a:solidFill>
+                <a:effectLst/>
+                <a:latin typeface="+mn-lt"/>
+                <a:ea typeface="+mn-ea"/>
+                <a:cs typeface="+mn-cs"/>
+              </a:rPr>
+              <a:t>Weekends show a single, gentler midday rise that stays below the threshold. This confirms that traffic is strongly driven by daily work routines.</a:t>
+            </a:r>
+          </a:p>
+          <a:p>
+            <a:r>
+              <a:rPr lang="en-US" sz="1800" kern="1200" dirty="0">
+                <a:solidFill>
+                  <a:schemeClr val="tx1"/>
+                </a:solidFill>
+                <a:effectLst/>
+                <a:latin typeface="+mn-lt"/>
+                <a:ea typeface="+mn-ea"/>
+                <a:cs typeface="+mn-cs"/>
+              </a:rPr>
+              <a:t> </a:t>
+            </a:r>
+          </a:p>
+          <a:p>
             <a:endParaRPr lang="en-US" dirty="0"/>
           </a:p>
         </p:txBody>
@@ -1934,6 +2634,34 @@
           <a:bodyPr/>
           <a:lstStyle/>
           <a:p>
+            <a:r>
+              <a:rPr lang="en-US" sz="1800" kern="1200" dirty="0">
+                <a:solidFill>
+                  <a:schemeClr val="tx1"/>
+                </a:solidFill>
+                <a:effectLst/>
+                <a:latin typeface="+mn-lt"/>
+                <a:ea typeface="+mn-ea"/>
+                <a:cs typeface="+mn-cs"/>
+              </a:rPr>
+              <a:t>The heatmap makes this even clearer. Each cell shows average flow for a specific hour and day combination. Darker blue means more traffic.</a:t>
+            </a:r>
+          </a:p>
+          <a:p>
+            <a:r>
+              <a:rPr lang="en-US" sz="1800" kern="1200" dirty="0">
+                <a:solidFill>
+                  <a:schemeClr val="tx1"/>
+                </a:solidFill>
+                <a:effectLst/>
+                <a:latin typeface="+mn-lt"/>
+                <a:ea typeface="+mn-ea"/>
+                <a:cs typeface="+mn-cs"/>
+              </a:rPr>
+              <a:t>The standout finding is that Friday 5-to-7 PM is the most congested period of the entire week. Weekend traffic is uniformly 9.6% lower than weekday average.</a:t>
+            </a:r>
+          </a:p>
+          <a:p>
             <a:endParaRPr lang="en-US" dirty="0"/>
           </a:p>
         </p:txBody>
@@ -2018,6 +2746,115 @@
           <a:bodyPr/>
           <a:lstStyle/>
           <a:p>
+            <a:r>
+              <a:rPr lang="en-US" sz="1800" kern="1200" dirty="0">
+                <a:solidFill>
+                  <a:schemeClr val="tx1"/>
+                </a:solidFill>
+                <a:effectLst/>
+                <a:latin typeface="+mn-lt"/>
+                <a:ea typeface="+mn-ea"/>
+                <a:cs typeface="+mn-cs"/>
+              </a:rPr>
+              <a:t>Let me summarize four key findings from our exploration.</a:t>
+            </a:r>
+          </a:p>
+          <a:p>
+            <a:r>
+              <a:rPr lang="en-US" sz="1800" kern="1200" dirty="0">
+                <a:solidFill>
+                  <a:schemeClr val="tx1"/>
+                </a:solidFill>
+                <a:effectLst/>
+                <a:latin typeface="+mn-lt"/>
+                <a:ea typeface="+mn-ea"/>
+                <a:cs typeface="+mn-cs"/>
+              </a:rPr>
+              <a:t>First, weekday twin peaks — morning and evening rush hours consistently breach the congestion threshold.</a:t>
+            </a:r>
+          </a:p>
+          <a:p>
+            <a:r>
+              <a:rPr lang="en-US" sz="1800" kern="1200" dirty="0">
+                <a:solidFill>
+                  <a:schemeClr val="tx1"/>
+                </a:solidFill>
+                <a:effectLst/>
+                <a:latin typeface="+mn-lt"/>
+                <a:ea typeface="+mn-ea"/>
+                <a:cs typeface="+mn-cs"/>
+              </a:rPr>
+              <a:t>Second, Friday PM is the worst — the heatmap confirms this as the peak congestion window.</a:t>
+            </a:r>
+          </a:p>
+          <a:p>
+            <a:r>
+              <a:rPr lang="en-US" sz="1800" kern="1200" dirty="0">
+                <a:solidFill>
+                  <a:schemeClr val="tx1"/>
+                </a:solidFill>
+                <a:effectLst/>
+                <a:latin typeface="+mn-lt"/>
+                <a:ea typeface="+mn-ea"/>
+                <a:cs typeface="+mn-cs"/>
+              </a:rPr>
+              <a:t>Third, congestion climbed from 10.5% in January to 29.6% in June, tracking pandemic recovery throughout 2021.</a:t>
+            </a:r>
+          </a:p>
+          <a:p>
+            <a:endParaRPr lang="en-US" sz="1800" kern="1200" dirty="0">
+              <a:solidFill>
+                <a:schemeClr val="tx1"/>
+              </a:solidFill>
+              <a:effectLst/>
+              <a:latin typeface="+mn-lt"/>
+              <a:ea typeface="+mn-ea"/>
+              <a:cs typeface="+mn-cs"/>
+            </a:endParaRPr>
+          </a:p>
+          <a:p>
+            <a:pPr marL="0" marR="0" lvl="0" indent="0" algn="l" defTabSz="914400" rtl="0" eaLnBrk="1" fontAlgn="auto" latinLnBrk="0" hangingPunct="1">
+              <a:lnSpc>
+                <a:spcPct val="100000"/>
+              </a:lnSpc>
+              <a:spcBef>
+                <a:spcPts val="0"/>
+              </a:spcBef>
+              <a:spcAft>
+                <a:spcPts val="0"/>
+              </a:spcAft>
+              <a:buClrTx/>
+              <a:buSzTx/>
+              <a:buFontTx/>
+              <a:buNone/>
+              <a:tabLst/>
+              <a:defRPr/>
+            </a:pPr>
+            <a:r>
+              <a:rPr lang="en-US" sz="1800" kern="1200" dirty="0">
+                <a:solidFill>
+                  <a:schemeClr val="tx1"/>
+                </a:solidFill>
+                <a:effectLst/>
+                <a:latin typeface="+mn-lt"/>
+                <a:ea typeface="+mn-ea"/>
+                <a:cs typeface="+mn-cs"/>
+              </a:rPr>
+              <a:t>And fourth, traffic shows very strong autocorrelation — lag-1 correlation is 0.999, and even one day ago the correlation is 0.946. This is important because it tells us how much of our model’s accuracy comes from just knowing recent traffic versus understanding structural patterns.</a:t>
+            </a:r>
+          </a:p>
+          <a:p>
+            <a:endParaRPr lang="en-US" sz="1800" kern="1200" dirty="0">
+              <a:solidFill>
+                <a:schemeClr val="tx1"/>
+              </a:solidFill>
+              <a:effectLst/>
+              <a:latin typeface="+mn-lt"/>
+              <a:ea typeface="+mn-ea"/>
+              <a:cs typeface="+mn-cs"/>
+            </a:endParaRPr>
+          </a:p>
+          <a:p>
             <a:endParaRPr lang="en-US" dirty="0"/>
           </a:p>
         </p:txBody>
@@ -2102,6 +2939,62 @@
           <a:bodyPr/>
           <a:lstStyle/>
           <a:p>
+            <a:r>
+              <a:rPr lang="en-US" sz="1800" kern="1200" dirty="0">
+                <a:solidFill>
+                  <a:schemeClr val="tx1"/>
+                </a:solidFill>
+                <a:effectLst/>
+                <a:latin typeface="+mn-lt"/>
+                <a:ea typeface="+mn-ea"/>
+                <a:cs typeface="+mn-cs"/>
+              </a:rPr>
+              <a:t>This slide answers our main research question.</a:t>
+            </a:r>
+          </a:p>
+          <a:p>
+            <a:r>
+              <a:rPr lang="en-US" sz="1800" kern="1200" dirty="0">
+                <a:solidFill>
+                  <a:schemeClr val="tx1"/>
+                </a:solidFill>
+                <a:effectLst/>
+                <a:latin typeface="+mn-lt"/>
+                <a:ea typeface="+mn-ea"/>
+                <a:cs typeface="+mn-cs"/>
+              </a:rPr>
+              <a:t>We found a strong positive correlation between congestion and ridership, with a Pearson r of 0.73 and p-value below 0.01.</a:t>
+            </a:r>
+          </a:p>
+          <a:p>
+            <a:r>
+              <a:rPr lang="en-US" sz="1800" kern="1200" dirty="0">
+                <a:solidFill>
+                  <a:schemeClr val="tx1"/>
+                </a:solidFill>
+                <a:effectLst/>
+                <a:latin typeface="+mn-lt"/>
+                <a:ea typeface="+mn-ea"/>
+                <a:cs typeface="+mn-cs"/>
+              </a:rPr>
+              <a:t>Ridership grew 68% from January to October, while congestion rates also climbed throughout the year.</a:t>
+            </a:r>
+          </a:p>
+          <a:p>
+            <a:r>
+              <a:rPr lang="en-US" sz="1800" kern="1200" dirty="0">
+                <a:solidFill>
+                  <a:schemeClr val="tx1"/>
+                </a:solidFill>
+                <a:effectLst/>
+                <a:latin typeface="+mn-lt"/>
+                <a:ea typeface="+mn-ea"/>
+                <a:cs typeface="+mn-cs"/>
+              </a:rPr>
+              <a:t>However, we need to be honest here — both variables increased together because of pandemic recovery, not necessarily because people switched from cars to transit. The OLS R² of 0.579 means congestion explains about 58% of ridership variation, but establishing true causality would require methods beyond this course, like instrumental variables or natural experiments.</a:t>
+            </a:r>
+          </a:p>
+          <a:p>
             <a:endParaRPr lang="en-US" dirty="0"/>
           </a:p>
         </p:txBody>
@@ -2185,6 +3078,87 @@
         <p:txBody>
           <a:bodyPr/>
           <a:lstStyle/>
+          <a:p>
+            <a:r>
+              <a:rPr lang="en-US" sz="1800" kern="1200" dirty="0">
+                <a:solidFill>
+                  <a:schemeClr val="tx1"/>
+                </a:solidFill>
+                <a:effectLst/>
+                <a:latin typeface="+mn-lt"/>
+                <a:ea typeface="+mn-ea"/>
+                <a:cs typeface="+mn-cs"/>
+              </a:rPr>
+              <a:t>Now Lets focus on traffic congestion</a:t>
+            </a:r>
+          </a:p>
+          <a:p>
+            <a:endParaRPr lang="en-US" sz="1800" kern="1200" dirty="0">
+              <a:solidFill>
+                <a:schemeClr val="tx1"/>
+              </a:solidFill>
+              <a:effectLst/>
+              <a:latin typeface="+mn-lt"/>
+              <a:ea typeface="+mn-ea"/>
+              <a:cs typeface="+mn-cs"/>
+            </a:endParaRPr>
+          </a:p>
+          <a:p>
+            <a:r>
+              <a:rPr lang="en-US" sz="1800" kern="1200" dirty="0">
+                <a:solidFill>
+                  <a:schemeClr val="tx1"/>
+                </a:solidFill>
+                <a:effectLst/>
+                <a:latin typeface="+mn-lt"/>
+                <a:ea typeface="+mn-ea"/>
+                <a:cs typeface="+mn-cs"/>
+              </a:rPr>
+              <a:t>We conducted formal hypothesis tests to validate our observations.</a:t>
+            </a:r>
+          </a:p>
+          <a:p>
+            <a:r>
+              <a:rPr lang="en-US" sz="1800" kern="1200" dirty="0">
+                <a:solidFill>
+                  <a:schemeClr val="tx1"/>
+                </a:solidFill>
+                <a:effectLst/>
+                <a:latin typeface="+mn-lt"/>
+                <a:ea typeface="+mn-ea"/>
+                <a:cs typeface="+mn-cs"/>
+              </a:rPr>
+              <a:t>Welch’s t-test confirmed that weekday traffic is significantly higher than weekend traffic — a 9.6% difference with p-value essentially zero.</a:t>
+            </a:r>
+          </a:p>
+          <a:p>
+            <a:r>
+              <a:rPr lang="en-US" sz="1800" kern="1200" dirty="0">
+                <a:solidFill>
+                  <a:schemeClr val="tx1"/>
+                </a:solidFill>
+                <a:effectLst/>
+                <a:latin typeface="+mn-lt"/>
+                <a:ea typeface="+mn-ea"/>
+                <a:cs typeface="+mn-cs"/>
+              </a:rPr>
+              <a:t>Peak hours carry 41.9% more traffic than off-peak, also highly significant.</a:t>
+            </a:r>
+          </a:p>
+          <a:p>
+            <a:r>
+              <a:rPr lang="en-US" sz="1800" kern="1200" dirty="0">
+                <a:solidFill>
+                  <a:schemeClr val="tx1"/>
+                </a:solidFill>
+                <a:effectLst/>
+                <a:latin typeface="+mn-lt"/>
+                <a:ea typeface="+mn-ea"/>
+                <a:cs typeface="+mn-cs"/>
+              </a:rPr>
+              <a:t>And the ADF test confirms our time series is stationary, which means we can apply ARIMA directly without additional differencing.</a:t>
+            </a:r>
+          </a:p>
           <a:p>
             <a:endParaRPr lang="en-US" dirty="0"/>
           </a:p>
@@ -3574,6 +4548,47 @@
           </a:p>
         </p:txBody>
       </p:sp>
+      <p:pic>
+        <p:nvPicPr>
+          <p:cNvPr id="28" name="Camera 27">
+            <a:extLst>
+              <a:ext uri="{FF2B5EF4-FFF2-40B4-BE49-F238E27FC236}">
+                <a16:creationId xmlns:a16="http://schemas.microsoft.com/office/drawing/2014/main" id="{7F146671-2029-65D2-2265-76B5F65D8E5F}"/>
+              </a:ext>
+            </a:extLst>
+          </p:cNvPr>
+          <p:cNvPicPr>
+            <a:picLocks noChangeAspect="1"/>
+            <a:extLst>
+              <a:ext uri="{51228E76-BA90-4043-B771-695A4F85340A}">
+                <alf:liveFeedProps xmlns:alf="http://schemas.microsoft.com/office/drawing/2021/livefeed"/>
+              </a:ext>
+            </a:extLst>
+          </p:cNvPicPr>
+          <p:nvPr/>
+        </p:nvPicPr>
+        <p:blipFill>
+          <a:blip>
+            <a:extLst>
+              <a:ext uri="{96DAC541-7B7A-43D3-8B79-37D633B846F1}">
+                <asvg:svgBlip xmlns:asvg="http://schemas.microsoft.com/office/drawing/2016/SVG/main" r:embed="rId3"/>
+              </a:ext>
+            </a:extLst>
+          </a:blip>
+          <a:stretch>
+            <a:fillRect/>
+          </a:stretch>
+        </p:blipFill>
+        <p:spPr>
+          <a:xfrm>
+            <a:off x="7539228" y="3538728"/>
+            <a:ext cx="1543050" cy="1543050"/>
+          </a:xfrm>
+          <a:prstGeom prst="ellipse">
+            <a:avLst/>
+          </a:prstGeom>
+        </p:spPr>
+      </p:pic>
     </p:spTree>
   </p:cSld>
   <p:clrMapOvr>
